--- a/docs/progress_presentation/CMADS_Progress_Presentation.pptx
+++ b/docs/progress_presentation/CMADS_Progress_Presentation.pptx
@@ -9386,7 +9386,7 @@
                           </a:solidFill>
                           <a:latin typeface="Calibri"/>
                         </a:rPr>
-                        <a:t>—</a:t>
+                        <a:t>8/20 · 40%</a:t>
                       </a:r>
                     </a:p>
                   </a:txBody>
@@ -9405,7 +9405,7 @@
                           </a:solidFill>
                           <a:latin typeface="Calibri"/>
                         </a:rPr>
-                        <a:t>—</a:t>
+                        <a:t>9/20 · 45%</a:t>
                       </a:r>
                     </a:p>
                   </a:txBody>
@@ -9449,7 +9449,7 @@
                           </a:solidFill>
                           <a:latin typeface="Calibri"/>
                         </a:rPr>
-                        <a:t>—</a:t>
+                        <a:t>80%</a:t>
                       </a:r>
                     </a:p>
                   </a:txBody>
@@ -9472,7 +9472,7 @@
                           </a:solidFill>
                           <a:latin typeface="Calibri"/>
                         </a:rPr>
-                        <a:t>—</a:t>
+                        <a:t>90%</a:t>
                       </a:r>
                     </a:p>
                   </a:txBody>
@@ -9516,7 +9516,7 @@
                           </a:solidFill>
                           <a:latin typeface="Calibri"/>
                         </a:rPr>
-                        <a:t>—</a:t>
+                        <a:t>113s</a:t>
                       </a:r>
                     </a:p>
                   </a:txBody>
@@ -9535,7 +9535,7 @@
                           </a:solidFill>
                           <a:latin typeface="Calibri"/>
                         </a:rPr>
-                        <a:t>—</a:t>
+                        <a:t>114s</a:t>
                       </a:r>
                     </a:p>
                   </a:txBody>
@@ -9579,7 +9579,7 @@
                           </a:solidFill>
                           <a:latin typeface="Calibri"/>
                         </a:rPr>
-                        <a:t>—</a:t>
+                        <a:t>19%</a:t>
                       </a:r>
                     </a:p>
                   </a:txBody>
@@ -9602,7 +9602,7 @@
                           </a:solidFill>
                           <a:latin typeface="Calibri"/>
                         </a:rPr>
-                        <a:t>—</a:t>
+                        <a:t>17%</a:t>
                       </a:r>
                     </a:p>
                   </a:txBody>
@@ -9643,11 +9643,11 @@
             <a:r>
               <a:rPr sz="1000" b="0" i="1">
                 <a:solidFill>
-                  <a:srgbClr val="7F8C8D"/>
+                  <a:srgbClr val="27AE60"/>
                 </a:solidFill>
                 <a:latin typeface="Calibri"/>
               </a:rPr>
-              <a:t>Numbers populated after the two 20-patient A/B runs finish.</a:t>
+              <a:t>+5 pp DIRECT, +10 pp Found-rate at no time cost.</a:t>
             </a:r>
           </a:p>
         </p:txBody>
